--- a/presentation/presentation.pptx
+++ b/presentation/presentation.pptx
@@ -3648,13 +3648,13 @@
           <a:p>
             <a:pPr algn="l"/>
             <a:r>
-              <a:rPr sz="1600" b="0" i="0">
+              <a:rPr sz="1600">
                 <a:solidFill>
                   <a:srgbClr val="4B5563"/>
                 </a:solidFill>
                 <a:latin typeface="Calibri"/>
               </a:rPr>
-              <a:t>Prioriser les controles vers les zones a forte densite de terrasses plutot qu'une repartition uniforme sur la ville — a valider avec des donnees plus fines (rue ou etablissement) avant d'en faire une regle operationnelle.</a:t>
+              <a:t>La densite de terrasses est une piste a explorer pour cibler la surveillance, pas une regle a appliquer telle quelle : signal base sur 20 arrondissements, sans controle du flux pieton ni de la densite commerciale generale -- a valider a l'echelle rue ou etablissement avant toute application operationnelle.</a:t>
             </a:r>
           </a:p>
         </p:txBody>
@@ -5820,7 +5820,7 @@
                 </a:solidFill>
                 <a:latin typeface="Calibri"/>
               </a:rPr>
-              <a:t>Question : a proximite d'une terrasse, les signalements ont-ils une composition differente de celle observee ailleurs ?</a:t>
+              <a:t>Question : a la meme adresse qu'une terrasse, les signalements ont-ils une composition differente de celle observee ailleurs ?</a:t>
             </a:r>
           </a:p>
           <a:p>
@@ -5987,16 +5987,51 @@
           </a:p>
         </p:txBody>
       </p:sp>
+      <p:sp>
+        <p:nvSpPr>
+          <p:cNvPr id="9" name="TextBox 8"/>
+          <p:cNvSpPr txBox="1"/>
+          <p:nvPr/>
+        </p:nvSpPr>
+        <p:spPr>
+          <a:xfrm>
+            <a:off x="11368735" y="6446520"/>
+            <a:ext cx="548640" cy="274320"/>
+          </a:xfrm>
+          <a:prstGeom prst="rect">
+            <a:avLst/>
+          </a:prstGeom>
+          <a:noFill/>
+        </p:spPr>
+        <p:txBody>
+          <a:bodyPr wrap="square">
+            <a:spAutoFit/>
+          </a:bodyPr>
+          <a:lstStyle/>
+          <a:p>
+            <a:pPr algn="r"/>
+            <a:r>
+              <a:rPr sz="1100" b="0" i="0">
+                <a:solidFill>
+                  <a:srgbClr val="4B5563"/>
+                </a:solidFill>
+                <a:latin typeface="Calibri"/>
+              </a:rPr>
+              <a:t>5</a:t>
+            </a:r>
+          </a:p>
+        </p:txBody>
+      </p:sp>
       <p:pic>
         <p:nvPicPr>
-          <p:cNvPr id="8" name="Picture 7" descr="chart_h1.png"/>
+          <p:cNvPr id="10" name="Picture 9" descr="chart_h1_fixed.png"/>
           <p:cNvPicPr>
             <a:picLocks noChangeAspect="1"/>
           </p:cNvPicPr>
           <p:nvPr/>
         </p:nvPicPr>
         <p:blipFill>
-          <a:blip r:embed="rId2"/>
+          <a:blip r:embed="rId3"/>
           <a:stretch>
             <a:fillRect/>
           </a:stretch>
@@ -6011,41 +6046,6 @@
           </a:prstGeom>
         </p:spPr>
       </p:pic>
-      <p:sp>
-        <p:nvSpPr>
-          <p:cNvPr id="9" name="TextBox 8"/>
-          <p:cNvSpPr txBox="1"/>
-          <p:nvPr/>
-        </p:nvSpPr>
-        <p:spPr>
-          <a:xfrm>
-            <a:off x="11368735" y="6446520"/>
-            <a:ext cx="548640" cy="274320"/>
-          </a:xfrm>
-          <a:prstGeom prst="rect">
-            <a:avLst/>
-          </a:prstGeom>
-          <a:noFill/>
-        </p:spPr>
-        <p:txBody>
-          <a:bodyPr wrap="square">
-            <a:spAutoFit/>
-          </a:bodyPr>
-          <a:lstStyle/>
-          <a:p>
-            <a:pPr algn="r"/>
-            <a:r>
-              <a:rPr sz="1100" b="0" i="0">
-                <a:solidFill>
-                  <a:srgbClr val="4B5563"/>
-                </a:solidFill>
-                <a:latin typeface="Calibri"/>
-              </a:rPr>
-              <a:t>5</a:t>
-            </a:r>
-          </a:p>
-        </p:txBody>
-      </p:sp>
     </p:spTree>
   </p:cSld>
   <p:clrMapOvr>

--- a/presentation/presentation.pptx
+++ b/presentation/presentation.pptx
@@ -5218,6 +5218,40 @@
           </a:p>
         </p:txBody>
       </p:sp>
+      <p:sp>
+        <p:nvSpPr>
+          <p:cNvPr id="24" name="TextBox 23"/>
+          <p:cNvSpPr txBox="1"/>
+          <p:nvPr/>
+        </p:nvSpPr>
+        <p:spPr>
+          <a:xfrm>
+            <a:off x="640080" y="6263640"/>
+            <a:ext cx="10881360" cy="365760"/>
+          </a:xfrm>
+          <a:prstGeom prst="rect">
+            <a:avLst/>
+          </a:prstGeom>
+          <a:noFill/>
+        </p:spPr>
+        <p:txBody>
+          <a:bodyPr wrap="none">
+            <a:spAutoFit/>
+          </a:bodyPr>
+          <a:lstStyle/>
+          <a:p>
+            <a:r>
+              <a:rPr sz="1200" i="1">
+                <a:solidFill>
+                  <a:srgbClr val="4B5563"/>
+                </a:solidFill>
+                <a:latin typeface="Calibri"/>
+              </a:rPr>
+              <a:t>Donnees extraites le 22 aout 2026 depuis l'API Open Data Paris.</a:t>
+            </a:r>
+          </a:p>
+        </p:txBody>
+      </p:sp>
     </p:spTree>
   </p:cSld>
   <p:clrMapOvr>
@@ -6633,7 +6667,7 @@
                 </a:solidFill>
                 <a:latin typeface="Calibri"/>
               </a:rPr>
-              <a:t>Spearman = 0,544 (p = 0,013)</a:t>
+              <a:t>Spearman = 0,544 (p = 0,013 ; n = 20 arrondissements)</a:t>
             </a:r>
           </a:p>
         </p:txBody>
@@ -6662,7 +6696,7 @@
           <a:p>
             <a:pPr algn="l"/>
             <a:r>
-              <a:rPr sz="1400" b="0" i="0">
+              <a:rPr sz="1400">
                 <a:solidFill>
                   <a:srgbClr val="4B5563"/>
                 </a:solidFill>
@@ -6672,9 +6706,8 @@
             </a:r>
           </a:p>
           <a:p>
-            <a:pPr algn="l"/>
-            <a:r>
-              <a:rPr sz="1400" b="0" i="0">
+            <a:r>
+              <a:rPr sz="1400">
                 <a:solidFill>
                   <a:srgbClr val="4B5563"/>
                 </a:solidFill>
@@ -6684,9 +6717,8 @@
             </a:r>
           </a:p>
           <a:p>
-            <a:pPr algn="l"/>
-            <a:r>
-              <a:rPr sz="1400" b="0" i="0">
+            <a:r>
+              <a:rPr sz="1400">
                 <a:solidFill>
                   <a:srgbClr val="4B5563"/>
                 </a:solidFill>
@@ -6696,9 +6728,8 @@
             </a:r>
           </a:p>
           <a:p>
-            <a:pPr algn="l"/>
-            <a:r>
-              <a:rPr sz="1400" b="0" i="0">
+            <a:r>
+              <a:rPr sz="1400">
                 <a:solidFill>
                   <a:srgbClr val="4B5563"/>
                 </a:solidFill>
@@ -6708,15 +6739,47 @@
             </a:r>
           </a:p>
           <a:p>
-            <a:pPr algn="l"/>
-            <a:r>
-              <a:rPr sz="1400" b="0" i="0">
+            <a:r>
+              <a:rPr sz="1400">
                 <a:solidFill>
                   <a:srgbClr val="4B5563"/>
                 </a:solidFill>
                 <a:latin typeface="Calibri"/>
               </a:rPr>
               <a:t>selon le modele.</a:t>
+            </a:r>
+          </a:p>
+          <a:p>
+            <a:r>
+              <a:rPr sz="1400">
+                <a:solidFill>
+                  <a:srgbClr val="4B5563"/>
+                </a:solidFill>
+                <a:latin typeface="Calibri"/>
+              </a:rPr>
+              <a:t/>
+            </a:r>
+          </a:p>
+          <a:p>
+            <a:r>
+              <a:rPr sz="1400" b="1">
+                <a:solidFill>
+                  <a:srgbClr val="1F3A5F"/>
+                </a:solidFill>
+                <a:latin typeface="Calibri"/>
+              </a:rPr>
+              <a:t>Association ecologique (niveau arrondissement) -- ne</a:t>
+            </a:r>
+          </a:p>
+          <a:p>
+            <a:r>
+              <a:rPr sz="1400">
+                <a:solidFill>
+                  <a:srgbClr val="4B5563"/>
+                </a:solidFill>
+                <a:latin typeface="Calibri"/>
+              </a:rPr>
+              <a:t>permet pas de conclure au niveau d'une terrasse individuelle.</a:t>
             </a:r>
           </a:p>
         </p:txBody>
